--- a/web/public/pitch/BlockID-Pitch-Deck-2026-09.pptx
+++ b/web/public/pitch/BlockID-Pitch-Deck-2026-09.pptx
@@ -6979,7 +6979,7 @@
                 <a:ea typeface="Arial" pitchFamily="34" charset="-122"/>
                 <a:cs typeface="Arial" pitchFamily="34" charset="-120"/>
               </a:rPr>
-              <a:t>Evidence: every claim labelled claimed, evidence-backed, verified or conflicting.</a:t>
+              <a:t>Evidence: every dimension shows its evidence level, what is verified and what is still unsupported.</a:t>
             </a:r>
             <a:endParaRPr lang="en-US" sz="1300" dirty="0"/>
           </a:p>
